--- a/documentos/TechChallenge_Fase_2_Apresentacao_07_2026.pptx
+++ b/documentos/TechChallenge_Fase_2_Apresentacao_07_2026.pptx
@@ -2,11 +2,12 @@
 <file path=ppt/presentation.xml><?xml version="1.0" encoding="utf-8"?>
 <p:presentation xmlns:a="http://schemas.openxmlformats.org/drawingml/2006/main" xmlns:r="http://schemas.openxmlformats.org/officeDocument/2006/relationships" xmlns:p="http://schemas.openxmlformats.org/presentationml/2006/main" saveSubsetFonts="1" autoCompressPictures="0">
   <p:sldMasterIdLst>
-    <p:sldMasterId id="2147484170" r:id="rId1"/>
+    <p:sldMasterId id="2147484266" r:id="rId1"/>
   </p:sldMasterIdLst>
   <p:sldIdLst>
-    <p:sldId id="259" r:id="rId2"/>
-    <p:sldId id="256" r:id="rId3"/>
+    <p:sldId id="260" r:id="rId2"/>
+    <p:sldId id="262" r:id="rId3"/>
+    <p:sldId id="261" r:id="rId4"/>
   </p:sldIdLst>
   <p:sldSz cx="9144000" cy="6858000" type="screen4x3"/>
   <p:notesSz cx="6858000" cy="9144000"/>
@@ -127,6 +128,8 @@
 <file path=ppt/revisionInfo.xml><?xml version="1.0" encoding="utf-8"?>
 <p1510:revInfo xmlns:a="http://schemas.openxmlformats.org/drawingml/2006/main" xmlns:r="http://schemas.openxmlformats.org/officeDocument/2006/relationships" xmlns:p1510="http://schemas.microsoft.com/office/powerpoint/2015/10/main">
   <p1510:revLst>
+    <p1510:client id="{4892C909-498F-4EBB-89F7-D51FD0FB54C2}" v="4" dt="2026-07-12T12:43:57.517"/>
+    <p1510:client id="{9F3C8F6F-23A2-11AC-82AB-61C53180B1CD}" v="637" dt="2026-07-12T17:17:30.526"/>
     <p1510:client id="{B270E6C3-2167-7699-06EC-34D71A89F398}" v="269" dt="2026-07-12T00:54:33.753"/>
   </p1510:revLst>
 </p1510:revInfo>
@@ -261,7 +264,7 @@
           <a:p>
             <a:fld id="{C764DE79-268F-4C1A-8933-263129D2AF90}" type="datetimeFigureOut">
               <a:rPr lang="en-US" dirty="0"/>
-              <a:t>7/11/2026</a:t>
+              <a:t>7/12/2026</a:t>
             </a:fld>
             <a:endParaRPr lang="en-US" dirty="0"/>
           </a:p>
@@ -312,7 +315,7 @@
     </p:spTree>
     <p:extLst>
       <p:ext uri="{BB962C8B-B14F-4D97-AF65-F5344CB8AC3E}">
-        <p14:creationId xmlns:p14="http://schemas.microsoft.com/office/powerpoint/2010/main" val="3246933790"/>
+        <p14:creationId xmlns:p14="http://schemas.microsoft.com/office/powerpoint/2010/main" val="2299963218"/>
       </p:ext>
     </p:extLst>
   </p:cSld>
@@ -429,7 +432,7 @@
           <a:p>
             <a:fld id="{C764DE79-268F-4C1A-8933-263129D2AF90}" type="datetimeFigureOut">
               <a:rPr lang="en-US" dirty="0"/>
-              <a:t>7/11/2026</a:t>
+              <a:t>7/12/2026</a:t>
             </a:fld>
             <a:endParaRPr lang="en-US" dirty="0"/>
           </a:p>
@@ -480,7 +483,7 @@
     </p:spTree>
     <p:extLst>
       <p:ext uri="{BB962C8B-B14F-4D97-AF65-F5344CB8AC3E}">
-        <p14:creationId xmlns:p14="http://schemas.microsoft.com/office/powerpoint/2010/main" val="2645726412"/>
+        <p14:creationId xmlns:p14="http://schemas.microsoft.com/office/powerpoint/2010/main" val="1341508115"/>
       </p:ext>
     </p:extLst>
   </p:cSld>
@@ -607,7 +610,7 @@
           <a:p>
             <a:fld id="{C764DE79-268F-4C1A-8933-263129D2AF90}" type="datetimeFigureOut">
               <a:rPr lang="en-US" dirty="0"/>
-              <a:t>7/11/2026</a:t>
+              <a:t>7/12/2026</a:t>
             </a:fld>
             <a:endParaRPr lang="en-US" dirty="0"/>
           </a:p>
@@ -658,7 +661,7 @@
     </p:spTree>
     <p:extLst>
       <p:ext uri="{BB962C8B-B14F-4D97-AF65-F5344CB8AC3E}">
-        <p14:creationId xmlns:p14="http://schemas.microsoft.com/office/powerpoint/2010/main" val="389536031"/>
+        <p14:creationId xmlns:p14="http://schemas.microsoft.com/office/powerpoint/2010/main" val="1793850872"/>
       </p:ext>
     </p:extLst>
   </p:cSld>
@@ -775,7 +778,7 @@
           <a:p>
             <a:fld id="{C764DE79-268F-4C1A-8933-263129D2AF90}" type="datetimeFigureOut">
               <a:rPr lang="en-US" dirty="0"/>
-              <a:t>7/11/2026</a:t>
+              <a:t>7/12/2026</a:t>
             </a:fld>
             <a:endParaRPr lang="en-US" dirty="0"/>
           </a:p>
@@ -826,7 +829,7 @@
     </p:spTree>
     <p:extLst>
       <p:ext uri="{BB962C8B-B14F-4D97-AF65-F5344CB8AC3E}">
-        <p14:creationId xmlns:p14="http://schemas.microsoft.com/office/powerpoint/2010/main" val="427143745"/>
+        <p14:creationId xmlns:p14="http://schemas.microsoft.com/office/powerpoint/2010/main" val="1239883272"/>
       </p:ext>
     </p:extLst>
   </p:cSld>
@@ -908,7 +911,7 @@
               <a:defRPr sz="2400">
                 <a:solidFill>
                   <a:schemeClr val="tx1">
-                    <a:shade val="82000"/>
+                    <a:tint val="82000"/>
                   </a:schemeClr>
                 </a:solidFill>
               </a:defRPr>
@@ -918,7 +921,7 @@
               <a:defRPr sz="2000">
                 <a:solidFill>
                   <a:schemeClr val="tx1">
-                    <a:shade val="82000"/>
+                    <a:tint val="82000"/>
                   </a:schemeClr>
                 </a:solidFill>
               </a:defRPr>
@@ -928,7 +931,7 @@
               <a:defRPr sz="1800">
                 <a:solidFill>
                   <a:schemeClr val="tx1">
-                    <a:shade val="82000"/>
+                    <a:tint val="82000"/>
                   </a:schemeClr>
                 </a:solidFill>
               </a:defRPr>
@@ -938,7 +941,7 @@
               <a:defRPr sz="1600">
                 <a:solidFill>
                   <a:schemeClr val="tx1">
-                    <a:shade val="82000"/>
+                    <a:tint val="82000"/>
                   </a:schemeClr>
                 </a:solidFill>
               </a:defRPr>
@@ -948,7 +951,7 @@
               <a:defRPr sz="1600">
                 <a:solidFill>
                   <a:schemeClr val="tx1">
-                    <a:shade val="82000"/>
+                    <a:tint val="82000"/>
                   </a:schemeClr>
                 </a:solidFill>
               </a:defRPr>
@@ -958,7 +961,7 @@
               <a:defRPr sz="1600">
                 <a:solidFill>
                   <a:schemeClr val="tx1">
-                    <a:shade val="82000"/>
+                    <a:tint val="82000"/>
                   </a:schemeClr>
                 </a:solidFill>
               </a:defRPr>
@@ -968,7 +971,7 @@
               <a:defRPr sz="1600">
                 <a:solidFill>
                   <a:schemeClr val="tx1">
-                    <a:shade val="82000"/>
+                    <a:tint val="82000"/>
                   </a:schemeClr>
                 </a:solidFill>
               </a:defRPr>
@@ -978,7 +981,7 @@
               <a:defRPr sz="1600">
                 <a:solidFill>
                   <a:schemeClr val="tx1">
-                    <a:shade val="82000"/>
+                    <a:tint val="82000"/>
                   </a:schemeClr>
                 </a:solidFill>
               </a:defRPr>
@@ -988,7 +991,7 @@
               <a:defRPr sz="1600">
                 <a:solidFill>
                   <a:schemeClr val="tx1">
-                    <a:shade val="82000"/>
+                    <a:tint val="82000"/>
                   </a:schemeClr>
                 </a:solidFill>
               </a:defRPr>
@@ -1020,7 +1023,7 @@
           <a:p>
             <a:fld id="{C764DE79-268F-4C1A-8933-263129D2AF90}" type="datetimeFigureOut">
               <a:rPr lang="en-US" dirty="0"/>
-              <a:t>7/11/2026</a:t>
+              <a:t>7/12/2026</a:t>
             </a:fld>
             <a:endParaRPr lang="en-US" dirty="0"/>
           </a:p>
@@ -1071,7 +1074,7 @@
     </p:spTree>
     <p:extLst>
       <p:ext uri="{BB962C8B-B14F-4D97-AF65-F5344CB8AC3E}">
-        <p14:creationId xmlns:p14="http://schemas.microsoft.com/office/powerpoint/2010/main" val="373408180"/>
+        <p14:creationId xmlns:p14="http://schemas.microsoft.com/office/powerpoint/2010/main" val="1006548215"/>
       </p:ext>
     </p:extLst>
   </p:cSld>
@@ -1249,7 +1252,7 @@
           <a:p>
             <a:fld id="{C764DE79-268F-4C1A-8933-263129D2AF90}" type="datetimeFigureOut">
               <a:rPr lang="en-US" dirty="0"/>
-              <a:t>7/11/2026</a:t>
+              <a:t>7/12/2026</a:t>
             </a:fld>
             <a:endParaRPr lang="en-US" dirty="0"/>
           </a:p>
@@ -1300,7 +1303,7 @@
     </p:spTree>
     <p:extLst>
       <p:ext uri="{BB962C8B-B14F-4D97-AF65-F5344CB8AC3E}">
-        <p14:creationId xmlns:p14="http://schemas.microsoft.com/office/powerpoint/2010/main" val="1936456037"/>
+        <p14:creationId xmlns:p14="http://schemas.microsoft.com/office/powerpoint/2010/main" val="4025462783"/>
       </p:ext>
     </p:extLst>
   </p:cSld>
@@ -1613,7 +1616,7 @@
           <a:p>
             <a:fld id="{C764DE79-268F-4C1A-8933-263129D2AF90}" type="datetimeFigureOut">
               <a:rPr lang="en-US" dirty="0"/>
-              <a:t>7/11/2026</a:t>
+              <a:t>7/12/2026</a:t>
             </a:fld>
             <a:endParaRPr lang="en-US" dirty="0"/>
           </a:p>
@@ -1664,7 +1667,7 @@
     </p:spTree>
     <p:extLst>
       <p:ext uri="{BB962C8B-B14F-4D97-AF65-F5344CB8AC3E}">
-        <p14:creationId xmlns:p14="http://schemas.microsoft.com/office/powerpoint/2010/main" val="3691617928"/>
+        <p14:creationId xmlns:p14="http://schemas.microsoft.com/office/powerpoint/2010/main" val="4293072788"/>
       </p:ext>
     </p:extLst>
   </p:cSld>
@@ -1730,7 +1733,7 @@
           <a:p>
             <a:fld id="{C764DE79-268F-4C1A-8933-263129D2AF90}" type="datetimeFigureOut">
               <a:rPr lang="en-US" dirty="0"/>
-              <a:t>7/11/2026</a:t>
+              <a:t>7/12/2026</a:t>
             </a:fld>
             <a:endParaRPr lang="en-US" dirty="0"/>
           </a:p>
@@ -1781,7 +1784,7 @@
     </p:spTree>
     <p:extLst>
       <p:ext uri="{BB962C8B-B14F-4D97-AF65-F5344CB8AC3E}">
-        <p14:creationId xmlns:p14="http://schemas.microsoft.com/office/powerpoint/2010/main" val="129317949"/>
+        <p14:creationId xmlns:p14="http://schemas.microsoft.com/office/powerpoint/2010/main" val="4195760221"/>
       </p:ext>
     </p:extLst>
   </p:cSld>
@@ -1825,7 +1828,7 @@
           <a:p>
             <a:fld id="{C764DE79-268F-4C1A-8933-263129D2AF90}" type="datetimeFigureOut">
               <a:rPr lang="en-US" dirty="0"/>
-              <a:t>7/11/2026</a:t>
+              <a:t>7/12/2026</a:t>
             </a:fld>
             <a:endParaRPr lang="en-US" dirty="0"/>
           </a:p>
@@ -1876,7 +1879,7 @@
     </p:spTree>
     <p:extLst>
       <p:ext uri="{BB962C8B-B14F-4D97-AF65-F5344CB8AC3E}">
-        <p14:creationId xmlns:p14="http://schemas.microsoft.com/office/powerpoint/2010/main" val="2598011916"/>
+        <p14:creationId xmlns:p14="http://schemas.microsoft.com/office/powerpoint/2010/main" val="4016156843"/>
       </p:ext>
     </p:extLst>
   </p:cSld>
@@ -2100,7 +2103,7 @@
           <a:p>
             <a:fld id="{C764DE79-268F-4C1A-8933-263129D2AF90}" type="datetimeFigureOut">
               <a:rPr lang="en-US" dirty="0"/>
-              <a:t>7/11/2026</a:t>
+              <a:t>7/12/2026</a:t>
             </a:fld>
             <a:endParaRPr lang="en-US" dirty="0"/>
           </a:p>
@@ -2151,7 +2154,7 @@
     </p:spTree>
     <p:extLst>
       <p:ext uri="{BB962C8B-B14F-4D97-AF65-F5344CB8AC3E}">
-        <p14:creationId xmlns:p14="http://schemas.microsoft.com/office/powerpoint/2010/main" val="1783585356"/>
+        <p14:creationId xmlns:p14="http://schemas.microsoft.com/office/powerpoint/2010/main" val="2011982984"/>
       </p:ext>
     </p:extLst>
   </p:cSld>
@@ -2352,7 +2355,7 @@
           <a:p>
             <a:fld id="{C764DE79-268F-4C1A-8933-263129D2AF90}" type="datetimeFigureOut">
               <a:rPr lang="en-US" dirty="0"/>
-              <a:t>7/11/2026</a:t>
+              <a:t>7/12/2026</a:t>
             </a:fld>
             <a:endParaRPr lang="en-US" dirty="0"/>
           </a:p>
@@ -2403,7 +2406,7 @@
     </p:spTree>
     <p:extLst>
       <p:ext uri="{BB962C8B-B14F-4D97-AF65-F5344CB8AC3E}">
-        <p14:creationId xmlns:p14="http://schemas.microsoft.com/office/powerpoint/2010/main" val="1671570371"/>
+        <p14:creationId xmlns:p14="http://schemas.microsoft.com/office/powerpoint/2010/main" val="1370607387"/>
       </p:ext>
     </p:extLst>
   </p:cSld>
@@ -2554,7 +2557,7 @@
               <a:defRPr sz="1200">
                 <a:solidFill>
                   <a:schemeClr val="tx1">
-                    <a:shade val="82000"/>
+                    <a:tint val="82000"/>
                   </a:schemeClr>
                 </a:solidFill>
               </a:defRPr>
@@ -2563,7 +2566,7 @@
           <a:p>
             <a:fld id="{C764DE79-268F-4C1A-8933-263129D2AF90}" type="datetimeFigureOut">
               <a:rPr lang="en-US" dirty="0"/>
-              <a:t>7/11/2026</a:t>
+              <a:t>7/12/2026</a:t>
             </a:fld>
             <a:endParaRPr lang="en-US" dirty="0"/>
           </a:p>
@@ -2595,7 +2598,7 @@
               <a:defRPr sz="1200">
                 <a:solidFill>
                   <a:schemeClr val="tx1">
-                    <a:shade val="82000"/>
+                    <a:tint val="82000"/>
                   </a:schemeClr>
                 </a:solidFill>
               </a:defRPr>
@@ -2632,7 +2635,7 @@
               <a:defRPr sz="1200">
                 <a:solidFill>
                   <a:schemeClr val="tx1">
-                    <a:shade val="82000"/>
+                    <a:tint val="82000"/>
                   </a:schemeClr>
                 </a:solidFill>
               </a:defRPr>
@@ -2650,23 +2653,23 @@
     </p:spTree>
     <p:extLst>
       <p:ext uri="{BB962C8B-B14F-4D97-AF65-F5344CB8AC3E}">
-        <p14:creationId xmlns:p14="http://schemas.microsoft.com/office/powerpoint/2010/main" val="1640810784"/>
+        <p14:creationId xmlns:p14="http://schemas.microsoft.com/office/powerpoint/2010/main" val="3493126978"/>
       </p:ext>
     </p:extLst>
   </p:cSld>
-  <p:clrMap bg1="dk1" tx1="lt1" bg2="dk2" tx2="lt2" accent1="accent1" accent2="accent2" accent3="accent3" accent4="accent4" accent5="accent5" accent6="accent6" hlink="hlink" folHlink="folHlink"/>
+  <p:clrMap bg1="lt1" tx1="dk1" bg2="lt2" tx2="dk2" accent1="accent1" accent2="accent2" accent3="accent3" accent4="accent4" accent5="accent5" accent6="accent6" hlink="hlink" folHlink="folHlink"/>
   <p:sldLayoutIdLst>
-    <p:sldLayoutId id="2147484171" r:id="rId1"/>
-    <p:sldLayoutId id="2147484172" r:id="rId2"/>
-    <p:sldLayoutId id="2147484173" r:id="rId3"/>
-    <p:sldLayoutId id="2147484174" r:id="rId4"/>
-    <p:sldLayoutId id="2147484175" r:id="rId5"/>
-    <p:sldLayoutId id="2147484176" r:id="rId6"/>
-    <p:sldLayoutId id="2147484177" r:id="rId7"/>
-    <p:sldLayoutId id="2147484178" r:id="rId8"/>
-    <p:sldLayoutId id="2147484179" r:id="rId9"/>
-    <p:sldLayoutId id="2147484180" r:id="rId10"/>
-    <p:sldLayoutId id="2147484181" r:id="rId11"/>
+    <p:sldLayoutId id="2147484267" r:id="rId1"/>
+    <p:sldLayoutId id="2147484268" r:id="rId2"/>
+    <p:sldLayoutId id="2147484269" r:id="rId3"/>
+    <p:sldLayoutId id="2147484270" r:id="rId4"/>
+    <p:sldLayoutId id="2147484271" r:id="rId5"/>
+    <p:sldLayoutId id="2147484272" r:id="rId6"/>
+    <p:sldLayoutId id="2147484273" r:id="rId7"/>
+    <p:sldLayoutId id="2147484274" r:id="rId8"/>
+    <p:sldLayoutId id="2147484275" r:id="rId9"/>
+    <p:sldLayoutId id="2147484276" r:id="rId10"/>
+    <p:sldLayoutId id="2147484277" r:id="rId11"/>
   </p:sldLayoutIdLst>
   <p:txStyles>
     <p:titleStyle>
@@ -2956,12 +2959,9 @@
   <p:cSld>
     <p:bg>
       <p:bgPr>
-        <a:blipFill>
-          <a:blip r:embed="rId2"/>
-          <a:stretch>
-            <a:fillRect t="-1000" b="-1000"/>
-          </a:stretch>
-        </a:blipFill>
+        <a:solidFill>
+          <a:schemeClr val="bg1"/>
+        </a:solidFill>
         <a:effectLst/>
       </p:bgPr>
     </p:bg>
@@ -2979,10 +2979,683 @@
           <a:chExt cx="0" cy="0"/>
         </a:xfrm>
       </p:grpSpPr>
+      <p:sp>
+        <p:nvSpPr>
+          <p:cNvPr id="80" name="Rectangle 55">
+            <a:extLst>
+              <a:ext uri="{FF2B5EF4-FFF2-40B4-BE49-F238E27FC236}">
+                <a16:creationId xmlns:a16="http://schemas.microsoft.com/office/drawing/2014/main" id="{FB5B0058-AF13-4859-B429-4EDDE2A26F7F}"/>
+              </a:ext>
+              <a:ext uri="{C183D7F6-B498-43B3-948B-1728B52AA6E4}">
+                <adec:decorative xmlns:adec="http://schemas.microsoft.com/office/drawing/2017/decorative" val="1"/>
+              </a:ext>
+            </a:extLst>
+          </p:cNvPr>
+          <p:cNvSpPr>
+            <a:spLocks noGrp="1" noRot="1" noChangeAspect="1" noMove="1" noResize="1" noEditPoints="1" noAdjustHandles="1" noChangeArrowheads="1" noChangeShapeType="1" noTextEdit="1"/>
+          </p:cNvSpPr>
+          <p:nvPr>
+            <p:extLst>
+              <p:ext uri="{386F3935-93C4-4BCD-93E2-E3B085C9AB24}">
+                <p16:designElem xmlns:p16="http://schemas.microsoft.com/office/powerpoint/2015/main" val="1"/>
+              </p:ext>
+            </p:extLst>
+          </p:nvPr>
+        </p:nvSpPr>
+        <p:spPr>
+          <a:xfrm>
+            <a:off x="0" y="0"/>
+            <a:ext cx="9144000" cy="6858000"/>
+          </a:xfrm>
+          <a:prstGeom prst="rect">
+            <a:avLst/>
+          </a:prstGeom>
+          <a:solidFill>
+            <a:schemeClr val="tx1">
+              <a:lumMod val="95000"/>
+              <a:lumOff val="5000"/>
+            </a:schemeClr>
+          </a:solidFill>
+          <a:ln>
+            <a:noFill/>
+          </a:ln>
+        </p:spPr>
+        <p:style>
+          <a:lnRef idx="2">
+            <a:schemeClr val="accent1">
+              <a:shade val="50000"/>
+            </a:schemeClr>
+          </a:lnRef>
+          <a:fillRef idx="1">
+            <a:schemeClr val="accent1"/>
+          </a:fillRef>
+          <a:effectRef idx="0">
+            <a:schemeClr val="accent1"/>
+          </a:effectRef>
+          <a:fontRef idx="minor">
+            <a:schemeClr val="lt1"/>
+          </a:fontRef>
+        </p:style>
+        <p:txBody>
+          <a:bodyPr rtlCol="0" anchor="ctr"/>
+          <a:lstStyle/>
+          <a:p>
+            <a:pPr algn="ctr"/>
+            <a:endParaRPr lang="en-US" dirty="0">
+              <a:solidFill>
+                <a:schemeClr val="bg1">
+                  <a:lumMod val="50000"/>
+                </a:schemeClr>
+              </a:solidFill>
+            </a:endParaRPr>
+          </a:p>
+        </p:txBody>
+      </p:sp>
+      <p:sp>
+        <p:nvSpPr>
+          <p:cNvPr id="2" name="Título 1">
+            <a:extLst>
+              <a:ext uri="{FF2B5EF4-FFF2-40B4-BE49-F238E27FC236}">
+                <a16:creationId xmlns:a16="http://schemas.microsoft.com/office/drawing/2014/main" id="{76CF8575-E373-EAA4-D74C-87F01CFE0E5A}"/>
+              </a:ext>
+            </a:extLst>
+          </p:cNvPr>
+          <p:cNvSpPr>
+            <a:spLocks noGrp="1"/>
+          </p:cNvSpPr>
+          <p:nvPr>
+            <p:ph type="ctrTitle"/>
+          </p:nvPr>
+        </p:nvSpPr>
+        <p:spPr>
+          <a:xfrm>
+            <a:off x="1449677" y="241162"/>
+            <a:ext cx="6712246" cy="2387600"/>
+          </a:xfrm>
+        </p:spPr>
+        <p:txBody>
+          <a:bodyPr>
+            <a:normAutofit/>
+          </a:bodyPr>
+          <a:lstStyle/>
+          <a:p>
+            <a:pPr algn="l"/>
+            <a:r>
+              <a:rPr lang="pt-BR" sz="4000" dirty="0">
+                <a:solidFill>
+                  <a:schemeClr val="bg1"/>
+                </a:solidFill>
+              </a:rPr>
+              <a:t>Fiap – </a:t>
+            </a:r>
+            <a:r>
+              <a:rPr lang="pt-BR" sz="4000" dirty="0" err="1">
+                <a:solidFill>
+                  <a:schemeClr val="bg1"/>
+                </a:solidFill>
+              </a:rPr>
+              <a:t>Postech</a:t>
+            </a:r>
+            <a:r>
+              <a:rPr lang="pt-BR" sz="4000" dirty="0">
+                <a:solidFill>
+                  <a:schemeClr val="bg1"/>
+                </a:solidFill>
+              </a:rPr>
+              <a:t> – IA para </a:t>
+            </a:r>
+            <a:r>
+              <a:rPr lang="pt-BR" sz="4000" dirty="0" err="1">
+                <a:solidFill>
+                  <a:schemeClr val="bg1"/>
+                </a:solidFill>
+              </a:rPr>
+              <a:t>Devs</a:t>
+            </a:r>
+            <a:br>
+              <a:rPr lang="pt-BR" sz="4000">
+                <a:solidFill>
+                  <a:schemeClr val="bg1"/>
+                </a:solidFill>
+              </a:rPr>
+            </a:br>
+            <a:r>
+              <a:rPr lang="pt-BR" sz="4000" dirty="0">
+                <a:solidFill>
+                  <a:schemeClr val="bg1"/>
+                </a:solidFill>
+              </a:rPr>
+              <a:t>2026</a:t>
+            </a:r>
+          </a:p>
+        </p:txBody>
+      </p:sp>
+      <p:sp>
+        <p:nvSpPr>
+          <p:cNvPr id="3" name="Subtítulo 2">
+            <a:extLst>
+              <a:ext uri="{FF2B5EF4-FFF2-40B4-BE49-F238E27FC236}">
+                <a16:creationId xmlns:a16="http://schemas.microsoft.com/office/drawing/2014/main" id="{6CB06083-1B71-0359-1E18-EF61DCC09607}"/>
+              </a:ext>
+            </a:extLst>
+          </p:cNvPr>
+          <p:cNvSpPr>
+            <a:spLocks noGrp="1"/>
+          </p:cNvSpPr>
+          <p:nvPr>
+            <p:ph type="subTitle" idx="1"/>
+          </p:nvPr>
+        </p:nvSpPr>
+        <p:spPr>
+          <a:xfrm>
+            <a:off x="1449676" y="2973457"/>
+            <a:ext cx="6574981" cy="443553"/>
+          </a:xfrm>
+        </p:spPr>
+        <p:txBody>
+          <a:bodyPr vert="horz" lIns="91440" tIns="45720" rIns="91440" bIns="45720" rtlCol="0" anchor="t">
+            <a:normAutofit/>
+          </a:bodyPr>
+          <a:lstStyle/>
+          <a:p>
+            <a:pPr algn="l"/>
+            <a:r>
+              <a:rPr lang="pt-BR" sz="2000">
+                <a:solidFill>
+                  <a:schemeClr val="bg1"/>
+                </a:solidFill>
+              </a:rPr>
+              <a:t>FASE 2 – PROJETO 2 - OTIMIZAÇÃO DE ROTAS MÉDICAS</a:t>
+            </a:r>
+          </a:p>
+        </p:txBody>
+      </p:sp>
+      <p:cxnSp>
+        <p:nvCxnSpPr>
+          <p:cNvPr id="81" name="Straight Connector 57">
+            <a:extLst>
+              <a:ext uri="{FF2B5EF4-FFF2-40B4-BE49-F238E27FC236}">
+                <a16:creationId xmlns:a16="http://schemas.microsoft.com/office/drawing/2014/main" id="{EC4521DE-248E-440D-AAD6-FD9E7D34B3BF}"/>
+              </a:ext>
+              <a:ext uri="{C183D7F6-B498-43B3-948B-1728B52AA6E4}">
+                <adec:decorative xmlns:adec="http://schemas.microsoft.com/office/drawing/2017/decorative" val="1"/>
+              </a:ext>
+            </a:extLst>
+          </p:cNvPr>
+          <p:cNvCxnSpPr>
+            <a:cxnSpLocks noGrp="1" noRot="1" noChangeAspect="1" noMove="1" noResize="1" noEditPoints="1" noAdjustHandles="1" noChangeArrowheads="1" noChangeShapeType="1"/>
+          </p:cNvCxnSpPr>
+          <p:nvPr>
+            <p:extLst>
+              <p:ext uri="{386F3935-93C4-4BCD-93E2-E3B085C9AB24}">
+                <p16:designElem xmlns:p16="http://schemas.microsoft.com/office/powerpoint/2015/main" val="1"/>
+              </p:ext>
+            </p:extLst>
+          </p:nvPr>
+        </p:nvCxnSpPr>
+        <p:spPr>
+          <a:xfrm>
+            <a:off x="438963" y="0"/>
+            <a:ext cx="0" cy="6858000"/>
+          </a:xfrm>
+          <a:prstGeom prst="line">
+            <a:avLst/>
+          </a:prstGeom>
+          <a:ln w="12700">
+            <a:solidFill>
+              <a:schemeClr val="accent2"/>
+            </a:solidFill>
+          </a:ln>
+        </p:spPr>
+        <p:style>
+          <a:lnRef idx="1">
+            <a:schemeClr val="accent1"/>
+          </a:lnRef>
+          <a:fillRef idx="0">
+            <a:schemeClr val="accent1"/>
+          </a:fillRef>
+          <a:effectRef idx="0">
+            <a:schemeClr val="accent1"/>
+          </a:effectRef>
+          <a:fontRef idx="minor">
+            <a:schemeClr val="tx1"/>
+          </a:fontRef>
+        </p:style>
+      </p:cxnSp>
+      <p:cxnSp>
+        <p:nvCxnSpPr>
+          <p:cNvPr id="82" name="Straight Connector 59">
+            <a:extLst>
+              <a:ext uri="{FF2B5EF4-FFF2-40B4-BE49-F238E27FC236}">
+                <a16:creationId xmlns:a16="http://schemas.microsoft.com/office/drawing/2014/main" id="{442C13FA-4C0F-42D0-9626-5BA6040D8C31}"/>
+              </a:ext>
+              <a:ext uri="{C183D7F6-B498-43B3-948B-1728B52AA6E4}">
+                <adec:decorative xmlns:adec="http://schemas.microsoft.com/office/drawing/2017/decorative" val="1"/>
+              </a:ext>
+            </a:extLst>
+          </p:cNvPr>
+          <p:cNvCxnSpPr>
+            <a:cxnSpLocks noGrp="1" noRot="1" noChangeAspect="1" noMove="1" noResize="1" noEditPoints="1" noAdjustHandles="1" noChangeArrowheads="1" noChangeShapeType="1"/>
+          </p:cNvCxnSpPr>
+          <p:nvPr>
+            <p:extLst>
+              <p:ext uri="{386F3935-93C4-4BCD-93E2-E3B085C9AB24}">
+                <p16:designElem xmlns:p16="http://schemas.microsoft.com/office/powerpoint/2015/main" val="1"/>
+              </p:ext>
+            </p:extLst>
+          </p:nvPr>
+        </p:nvCxnSpPr>
+        <p:spPr>
+          <a:xfrm flipH="1">
+            <a:off x="0" y="6252485"/>
+            <a:ext cx="9144000" cy="0"/>
+          </a:xfrm>
+          <a:prstGeom prst="line">
+            <a:avLst/>
+          </a:prstGeom>
+          <a:ln w="12700">
+            <a:solidFill>
+              <a:schemeClr val="accent2"/>
+            </a:solidFill>
+          </a:ln>
+        </p:spPr>
+        <p:style>
+          <a:lnRef idx="1">
+            <a:schemeClr val="accent1"/>
+          </a:lnRef>
+          <a:fillRef idx="0">
+            <a:schemeClr val="accent1"/>
+          </a:fillRef>
+          <a:effectRef idx="0">
+            <a:schemeClr val="accent1"/>
+          </a:effectRef>
+          <a:fontRef idx="minor">
+            <a:schemeClr val="tx1"/>
+          </a:fontRef>
+        </p:style>
+      </p:cxnSp>
+      <p:sp>
+        <p:nvSpPr>
+          <p:cNvPr id="4" name="Espaço Reservado para Data 3">
+            <a:extLst>
+              <a:ext uri="{FF2B5EF4-FFF2-40B4-BE49-F238E27FC236}">
+                <a16:creationId xmlns:a16="http://schemas.microsoft.com/office/drawing/2014/main" id="{A87DD115-6C21-32C7-1003-73D27B5DD169}"/>
+              </a:ext>
+            </a:extLst>
+          </p:cNvPr>
+          <p:cNvSpPr>
+            <a:spLocks noGrp="1"/>
+          </p:cNvSpPr>
+          <p:nvPr>
+            <p:ph type="dt" sz="half" idx="10"/>
+          </p:nvPr>
+        </p:nvSpPr>
+        <p:spPr>
+          <a:xfrm>
+            <a:off x="1249149" y="6356350"/>
+            <a:ext cx="2057400" cy="365125"/>
+          </a:xfrm>
+        </p:spPr>
+        <p:txBody>
+          <a:bodyPr>
+            <a:normAutofit/>
+          </a:bodyPr>
+          <a:lstStyle/>
+          <a:p>
+            <a:pPr>
+              <a:spcAft>
+                <a:spcPts val="600"/>
+              </a:spcAft>
+            </a:pPr>
+            <a:fld id="{2E6BCE47-ED84-4E6B-A921-56FE573373A9}" type="datetime1">
+              <a:rPr lang="en-US">
+                <a:solidFill>
+                  <a:schemeClr val="bg1">
+                    <a:lumMod val="50000"/>
+                  </a:schemeClr>
+                </a:solidFill>
+              </a:rPr>
+              <a:pPr>
+                <a:spcAft>
+                  <a:spcPts val="600"/>
+                </a:spcAft>
+              </a:pPr>
+              <a:t>7/12/2026</a:t>
+            </a:fld>
+            <a:endParaRPr lang="en-US">
+              <a:solidFill>
+                <a:schemeClr val="bg1">
+                  <a:lumMod val="50000"/>
+                </a:schemeClr>
+              </a:solidFill>
+            </a:endParaRPr>
+          </a:p>
+        </p:txBody>
+      </p:sp>
+      <p:sp>
+        <p:nvSpPr>
+          <p:cNvPr id="5" name="Espaço Reservado para Rodapé 4">
+            <a:extLst>
+              <a:ext uri="{FF2B5EF4-FFF2-40B4-BE49-F238E27FC236}">
+                <a16:creationId xmlns:a16="http://schemas.microsoft.com/office/drawing/2014/main" id="{5A664BF3-B561-05A5-8EB8-37317D1084A0}"/>
+              </a:ext>
+            </a:extLst>
+          </p:cNvPr>
+          <p:cNvSpPr>
+            <a:spLocks noGrp="1"/>
+          </p:cNvSpPr>
+          <p:nvPr>
+            <p:ph type="ftr" sz="quarter" idx="11"/>
+          </p:nvPr>
+        </p:nvSpPr>
+        <p:spPr>
+          <a:xfrm>
+            <a:off x="3547841" y="6356350"/>
+            <a:ext cx="3086100" cy="365125"/>
+          </a:xfrm>
+        </p:spPr>
+        <p:txBody>
+          <a:bodyPr>
+            <a:normAutofit/>
+          </a:bodyPr>
+          <a:lstStyle/>
+          <a:p>
+            <a:pPr>
+              <a:lnSpc>
+                <a:spcPct val="90000"/>
+              </a:lnSpc>
+              <a:spcAft>
+                <a:spcPts val="600"/>
+              </a:spcAft>
+            </a:pPr>
+            <a:r>
+              <a:rPr lang="en-US" sz="700">
+                <a:solidFill>
+                  <a:schemeClr val="bg1">
+                    <a:lumMod val="50000"/>
+                  </a:schemeClr>
+                </a:solidFill>
+              </a:rPr>
+              <a:t>
+              </a:t>
+            </a:r>
+          </a:p>
+        </p:txBody>
+      </p:sp>
+      <p:sp>
+        <p:nvSpPr>
+          <p:cNvPr id="6" name="Espaço Reservado para Número de Slide 5">
+            <a:extLst>
+              <a:ext uri="{FF2B5EF4-FFF2-40B4-BE49-F238E27FC236}">
+                <a16:creationId xmlns:a16="http://schemas.microsoft.com/office/drawing/2014/main" id="{0FE922C6-DB01-5F86-2D16-DD5CAC4BF3C9}"/>
+              </a:ext>
+            </a:extLst>
+          </p:cNvPr>
+          <p:cNvSpPr>
+            <a:spLocks noGrp="1"/>
+          </p:cNvSpPr>
+          <p:nvPr>
+            <p:ph type="sldNum" sz="quarter" idx="12"/>
+          </p:nvPr>
+        </p:nvSpPr>
+        <p:spPr>
+          <a:xfrm>
+            <a:off x="6918595" y="6356350"/>
+            <a:ext cx="1334620" cy="365125"/>
+          </a:xfrm>
+        </p:spPr>
+        <p:txBody>
+          <a:bodyPr>
+            <a:normAutofit/>
+          </a:bodyPr>
+          <a:lstStyle/>
+          <a:p>
+            <a:pPr>
+              <a:spcAft>
+                <a:spcPts val="600"/>
+              </a:spcAft>
+            </a:pPr>
+            <a:fld id="{E30AF5A0-43BB-4336-8627-9123B9144D80}" type="slidenum">
+              <a:rPr lang="en-US">
+                <a:solidFill>
+                  <a:schemeClr val="bg1">
+                    <a:lumMod val="50000"/>
+                  </a:schemeClr>
+                </a:solidFill>
+              </a:rPr>
+              <a:pPr>
+                <a:spcAft>
+                  <a:spcPts val="600"/>
+                </a:spcAft>
+              </a:pPr>
+              <a:t>1</a:t>
+            </a:fld>
+            <a:endParaRPr lang="en-US">
+              <a:solidFill>
+                <a:schemeClr val="bg1">
+                  <a:lumMod val="50000"/>
+                </a:schemeClr>
+              </a:solidFill>
+            </a:endParaRPr>
+          </a:p>
+        </p:txBody>
+      </p:sp>
+      <p:sp>
+        <p:nvSpPr>
+          <p:cNvPr id="8" name="Subtítulo 2">
+            <a:extLst>
+              <a:ext uri="{FF2B5EF4-FFF2-40B4-BE49-F238E27FC236}">
+                <a16:creationId xmlns:a16="http://schemas.microsoft.com/office/drawing/2014/main" id="{696DFEA2-6E5E-D728-E37E-814B08AFF0F8}"/>
+              </a:ext>
+            </a:extLst>
+          </p:cNvPr>
+          <p:cNvSpPr txBox="1">
+            <a:spLocks/>
+          </p:cNvSpPr>
+          <p:nvPr/>
+        </p:nvSpPr>
+        <p:spPr>
+          <a:xfrm>
+            <a:off x="461296" y="6358294"/>
+            <a:ext cx="6053773" cy="914469"/>
+          </a:xfrm>
+          <a:prstGeom prst="rect">
+            <a:avLst/>
+          </a:prstGeom>
+        </p:spPr>
+        <p:txBody>
+          <a:bodyPr vert="horz" lIns="91440" tIns="45720" rIns="91440" bIns="45720" rtlCol="0" anchor="t">
+            <a:normAutofit/>
+          </a:bodyPr>
+          <a:lstStyle>
+            <a:lvl1pPr marL="0" indent="0" algn="ctr" defTabSz="914400" rtl="0" eaLnBrk="1" latinLnBrk="0" hangingPunct="1">
+              <a:lnSpc>
+                <a:spcPct val="90000"/>
+              </a:lnSpc>
+              <a:spcBef>
+                <a:spcPts val="1000"/>
+              </a:spcBef>
+              <a:buFont typeface="Arial" panose="020B0604020202020204" pitchFamily="34" charset="0"/>
+              <a:buNone/>
+              <a:defRPr sz="2400" kern="1200">
+                <a:solidFill>
+                  <a:schemeClr val="tx1"/>
+                </a:solidFill>
+                <a:latin typeface="+mn-lt"/>
+                <a:ea typeface="+mn-ea"/>
+                <a:cs typeface="+mn-cs"/>
+              </a:defRPr>
+            </a:lvl1pPr>
+            <a:lvl2pPr marL="457200" indent="0" algn="ctr" defTabSz="914400" rtl="0" eaLnBrk="1" latinLnBrk="0" hangingPunct="1">
+              <a:lnSpc>
+                <a:spcPct val="90000"/>
+              </a:lnSpc>
+              <a:spcBef>
+                <a:spcPts val="500"/>
+              </a:spcBef>
+              <a:buFont typeface="Arial" panose="020B0604020202020204" pitchFamily="34" charset="0"/>
+              <a:buNone/>
+              <a:defRPr sz="2000" kern="1200">
+                <a:solidFill>
+                  <a:schemeClr val="tx1"/>
+                </a:solidFill>
+                <a:latin typeface="+mn-lt"/>
+                <a:ea typeface="+mn-ea"/>
+                <a:cs typeface="+mn-cs"/>
+              </a:defRPr>
+            </a:lvl2pPr>
+            <a:lvl3pPr marL="914400" indent="0" algn="ctr" defTabSz="914400" rtl="0" eaLnBrk="1" latinLnBrk="0" hangingPunct="1">
+              <a:lnSpc>
+                <a:spcPct val="90000"/>
+              </a:lnSpc>
+              <a:spcBef>
+                <a:spcPts val="500"/>
+              </a:spcBef>
+              <a:buFont typeface="Arial" panose="020B0604020202020204" pitchFamily="34" charset="0"/>
+              <a:buNone/>
+              <a:defRPr sz="1800" kern="1200">
+                <a:solidFill>
+                  <a:schemeClr val="tx1"/>
+                </a:solidFill>
+                <a:latin typeface="+mn-lt"/>
+                <a:ea typeface="+mn-ea"/>
+                <a:cs typeface="+mn-cs"/>
+              </a:defRPr>
+            </a:lvl3pPr>
+            <a:lvl4pPr marL="1371600" indent="0" algn="ctr" defTabSz="914400" rtl="0" eaLnBrk="1" latinLnBrk="0" hangingPunct="1">
+              <a:lnSpc>
+                <a:spcPct val="90000"/>
+              </a:lnSpc>
+              <a:spcBef>
+                <a:spcPts val="500"/>
+              </a:spcBef>
+              <a:buFont typeface="Arial" panose="020B0604020202020204" pitchFamily="34" charset="0"/>
+              <a:buNone/>
+              <a:defRPr sz="1600" kern="1200">
+                <a:solidFill>
+                  <a:schemeClr val="tx1"/>
+                </a:solidFill>
+                <a:latin typeface="+mn-lt"/>
+                <a:ea typeface="+mn-ea"/>
+                <a:cs typeface="+mn-cs"/>
+              </a:defRPr>
+            </a:lvl4pPr>
+            <a:lvl5pPr marL="1828800" indent="0" algn="ctr" defTabSz="914400" rtl="0" eaLnBrk="1" latinLnBrk="0" hangingPunct="1">
+              <a:lnSpc>
+                <a:spcPct val="90000"/>
+              </a:lnSpc>
+              <a:spcBef>
+                <a:spcPts val="500"/>
+              </a:spcBef>
+              <a:buFont typeface="Arial" panose="020B0604020202020204" pitchFamily="34" charset="0"/>
+              <a:buNone/>
+              <a:defRPr sz="1600" kern="1200">
+                <a:solidFill>
+                  <a:schemeClr val="tx1"/>
+                </a:solidFill>
+                <a:latin typeface="+mn-lt"/>
+                <a:ea typeface="+mn-ea"/>
+                <a:cs typeface="+mn-cs"/>
+              </a:defRPr>
+            </a:lvl5pPr>
+            <a:lvl6pPr marL="2286000" indent="0" algn="ctr" defTabSz="914400" rtl="0" eaLnBrk="1" latinLnBrk="0" hangingPunct="1">
+              <a:lnSpc>
+                <a:spcPct val="90000"/>
+              </a:lnSpc>
+              <a:spcBef>
+                <a:spcPts val="500"/>
+              </a:spcBef>
+              <a:buFont typeface="Arial" panose="020B0604020202020204" pitchFamily="34" charset="0"/>
+              <a:buNone/>
+              <a:defRPr sz="1600" kern="1200">
+                <a:solidFill>
+                  <a:schemeClr val="tx1"/>
+                </a:solidFill>
+                <a:latin typeface="+mn-lt"/>
+                <a:ea typeface="+mn-ea"/>
+                <a:cs typeface="+mn-cs"/>
+              </a:defRPr>
+            </a:lvl6pPr>
+            <a:lvl7pPr marL="2743200" indent="0" algn="ctr" defTabSz="914400" rtl="0" eaLnBrk="1" latinLnBrk="0" hangingPunct="1">
+              <a:lnSpc>
+                <a:spcPct val="90000"/>
+              </a:lnSpc>
+              <a:spcBef>
+                <a:spcPts val="500"/>
+              </a:spcBef>
+              <a:buFont typeface="Arial" panose="020B0604020202020204" pitchFamily="34" charset="0"/>
+              <a:buNone/>
+              <a:defRPr sz="1600" kern="1200">
+                <a:solidFill>
+                  <a:schemeClr val="tx1"/>
+                </a:solidFill>
+                <a:latin typeface="+mn-lt"/>
+                <a:ea typeface="+mn-ea"/>
+                <a:cs typeface="+mn-cs"/>
+              </a:defRPr>
+            </a:lvl7pPr>
+            <a:lvl8pPr marL="3200400" indent="0" algn="ctr" defTabSz="914400" rtl="0" eaLnBrk="1" latinLnBrk="0" hangingPunct="1">
+              <a:lnSpc>
+                <a:spcPct val="90000"/>
+              </a:lnSpc>
+              <a:spcBef>
+                <a:spcPts val="500"/>
+              </a:spcBef>
+              <a:buFont typeface="Arial" panose="020B0604020202020204" pitchFamily="34" charset="0"/>
+              <a:buNone/>
+              <a:defRPr sz="1600" kern="1200">
+                <a:solidFill>
+                  <a:schemeClr val="tx1"/>
+                </a:solidFill>
+                <a:latin typeface="+mn-lt"/>
+                <a:ea typeface="+mn-ea"/>
+                <a:cs typeface="+mn-cs"/>
+              </a:defRPr>
+            </a:lvl8pPr>
+            <a:lvl9pPr marL="3657600" indent="0" algn="ctr" defTabSz="914400" rtl="0" eaLnBrk="1" latinLnBrk="0" hangingPunct="1">
+              <a:lnSpc>
+                <a:spcPct val="90000"/>
+              </a:lnSpc>
+              <a:spcBef>
+                <a:spcPts val="500"/>
+              </a:spcBef>
+              <a:buFont typeface="Arial" panose="020B0604020202020204" pitchFamily="34" charset="0"/>
+              <a:buNone/>
+              <a:defRPr sz="1600" kern="1200">
+                <a:solidFill>
+                  <a:schemeClr val="tx1"/>
+                </a:solidFill>
+                <a:latin typeface="+mn-lt"/>
+                <a:ea typeface="+mn-ea"/>
+                <a:cs typeface="+mn-cs"/>
+              </a:defRPr>
+            </a:lvl9pPr>
+          </a:lstStyle>
+          <a:p>
+            <a:pPr algn="l"/>
+            <a:r>
+              <a:rPr lang="pt-BR" sz="1400" dirty="0">
+                <a:solidFill>
+                  <a:schemeClr val="bg1"/>
+                </a:solidFill>
+              </a:rPr>
+              <a:t>Eduardo Toshio Yonamine – 9IADT – </a:t>
+            </a:r>
+            <a:r>
+              <a:rPr lang="pt-BR" sz="1400">
+                <a:solidFill>
+                  <a:schemeClr val="bg1"/>
+                </a:solidFill>
+              </a:rPr>
+              <a:t>GRUPO 37</a:t>
+            </a:r>
+          </a:p>
+        </p:txBody>
+      </p:sp>
     </p:spTree>
     <p:extLst>
       <p:ext uri="{BB962C8B-B14F-4D97-AF65-F5344CB8AC3E}">
-        <p14:creationId xmlns:p14="http://schemas.microsoft.com/office/powerpoint/2010/main" val="3254617749"/>
+        <p14:creationId xmlns:p14="http://schemas.microsoft.com/office/powerpoint/2010/main" val="3089392305"/>
       </p:ext>
     </p:extLst>
   </p:cSld>
@@ -2997,15 +3670,772 @@
   <p:cSld>
     <p:bg>
       <p:bgPr>
-        <a:blipFill>
-          <a:blip r:embed="rId2"/>
-          <a:stretch>
-            <a:fillRect l="-6000" r="-6000"/>
-          </a:stretch>
-        </a:blipFill>
+        <a:solidFill>
+          <a:schemeClr val="bg1"/>
+        </a:solidFill>
         <a:effectLst/>
       </p:bgPr>
     </p:bg>
+    <p:spTree>
+      <p:nvGrpSpPr>
+        <p:cNvPr id="1" name="">
+          <a:extLst>
+            <a:ext uri="{FF2B5EF4-FFF2-40B4-BE49-F238E27FC236}">
+              <a16:creationId xmlns:a16="http://schemas.microsoft.com/office/drawing/2014/main" id="{DD611BB1-F5A8-D830-CB04-D7375898E831}"/>
+            </a:ext>
+          </a:extLst>
+        </p:cNvPr>
+        <p:cNvGrpSpPr/>
+        <p:nvPr/>
+      </p:nvGrpSpPr>
+      <p:grpSpPr>
+        <a:xfrm>
+          <a:off x="0" y="0"/>
+          <a:ext cx="0" cy="0"/>
+          <a:chOff x="0" y="0"/>
+          <a:chExt cx="0" cy="0"/>
+        </a:xfrm>
+      </p:grpSpPr>
+      <p:sp>
+        <p:nvSpPr>
+          <p:cNvPr id="80" name="Rectangle 55">
+            <a:extLst>
+              <a:ext uri="{FF2B5EF4-FFF2-40B4-BE49-F238E27FC236}">
+                <a16:creationId xmlns:a16="http://schemas.microsoft.com/office/drawing/2014/main" id="{88797EAC-6CDB-CA75-E2AF-E4CE4673AC5C}"/>
+              </a:ext>
+              <a:ext uri="{C183D7F6-B498-43B3-948B-1728B52AA6E4}">
+                <adec:decorative xmlns:adec="http://schemas.microsoft.com/office/drawing/2017/decorative" val="1"/>
+              </a:ext>
+            </a:extLst>
+          </p:cNvPr>
+          <p:cNvSpPr>
+            <a:spLocks noGrp="1" noRot="1" noChangeAspect="1" noMove="1" noResize="1" noEditPoints="1" noAdjustHandles="1" noChangeArrowheads="1" noChangeShapeType="1" noTextEdit="1"/>
+          </p:cNvSpPr>
+          <p:nvPr>
+            <p:extLst>
+              <p:ext uri="{386F3935-93C4-4BCD-93E2-E3B085C9AB24}">
+                <p16:designElem xmlns:p16="http://schemas.microsoft.com/office/powerpoint/2015/main" val="1"/>
+              </p:ext>
+            </p:extLst>
+          </p:nvPr>
+        </p:nvSpPr>
+        <p:spPr>
+          <a:xfrm>
+            <a:off x="0" y="0"/>
+            <a:ext cx="9144000" cy="6858000"/>
+          </a:xfrm>
+          <a:prstGeom prst="rect">
+            <a:avLst/>
+          </a:prstGeom>
+          <a:solidFill>
+            <a:schemeClr val="tx1">
+              <a:lumMod val="95000"/>
+              <a:lumOff val="5000"/>
+            </a:schemeClr>
+          </a:solidFill>
+          <a:ln>
+            <a:noFill/>
+          </a:ln>
+        </p:spPr>
+        <p:style>
+          <a:lnRef idx="2">
+            <a:schemeClr val="accent1">
+              <a:shade val="50000"/>
+            </a:schemeClr>
+          </a:lnRef>
+          <a:fillRef idx="1">
+            <a:schemeClr val="accent1"/>
+          </a:fillRef>
+          <a:effectRef idx="0">
+            <a:schemeClr val="accent1"/>
+          </a:effectRef>
+          <a:fontRef idx="minor">
+            <a:schemeClr val="lt1"/>
+          </a:fontRef>
+        </p:style>
+        <p:txBody>
+          <a:bodyPr rtlCol="0" anchor="ctr"/>
+          <a:lstStyle/>
+          <a:p>
+            <a:pPr algn="ctr"/>
+            <a:endParaRPr lang="en-US" dirty="0">
+              <a:solidFill>
+                <a:schemeClr val="bg1">
+                  <a:lumMod val="50000"/>
+                </a:schemeClr>
+              </a:solidFill>
+            </a:endParaRPr>
+          </a:p>
+        </p:txBody>
+      </p:sp>
+      <p:cxnSp>
+        <p:nvCxnSpPr>
+          <p:cNvPr id="81" name="Straight Connector 57">
+            <a:extLst>
+              <a:ext uri="{FF2B5EF4-FFF2-40B4-BE49-F238E27FC236}">
+                <a16:creationId xmlns:a16="http://schemas.microsoft.com/office/drawing/2014/main" id="{B5D8FAFA-FC74-B9EE-49B0-A93A2776F4E0}"/>
+              </a:ext>
+              <a:ext uri="{C183D7F6-B498-43B3-948B-1728B52AA6E4}">
+                <adec:decorative xmlns:adec="http://schemas.microsoft.com/office/drawing/2017/decorative" val="1"/>
+              </a:ext>
+            </a:extLst>
+          </p:cNvPr>
+          <p:cNvCxnSpPr>
+            <a:cxnSpLocks noGrp="1" noRot="1" noChangeAspect="1" noMove="1" noResize="1" noEditPoints="1" noAdjustHandles="1" noChangeArrowheads="1" noChangeShapeType="1"/>
+          </p:cNvCxnSpPr>
+          <p:nvPr>
+            <p:extLst>
+              <p:ext uri="{386F3935-93C4-4BCD-93E2-E3B085C9AB24}">
+                <p16:designElem xmlns:p16="http://schemas.microsoft.com/office/powerpoint/2015/main" val="1"/>
+              </p:ext>
+            </p:extLst>
+          </p:nvPr>
+        </p:nvCxnSpPr>
+        <p:spPr>
+          <a:xfrm>
+            <a:off x="438963" y="0"/>
+            <a:ext cx="0" cy="6858000"/>
+          </a:xfrm>
+          <a:prstGeom prst="line">
+            <a:avLst/>
+          </a:prstGeom>
+          <a:ln w="12700">
+            <a:solidFill>
+              <a:schemeClr val="accent2"/>
+            </a:solidFill>
+          </a:ln>
+        </p:spPr>
+        <p:style>
+          <a:lnRef idx="1">
+            <a:schemeClr val="accent1"/>
+          </a:lnRef>
+          <a:fillRef idx="0">
+            <a:schemeClr val="accent1"/>
+          </a:fillRef>
+          <a:effectRef idx="0">
+            <a:schemeClr val="accent1"/>
+          </a:effectRef>
+          <a:fontRef idx="minor">
+            <a:schemeClr val="tx1"/>
+          </a:fontRef>
+        </p:style>
+      </p:cxnSp>
+      <p:cxnSp>
+        <p:nvCxnSpPr>
+          <p:cNvPr id="82" name="Straight Connector 59">
+            <a:extLst>
+              <a:ext uri="{FF2B5EF4-FFF2-40B4-BE49-F238E27FC236}">
+                <a16:creationId xmlns:a16="http://schemas.microsoft.com/office/drawing/2014/main" id="{8266C5F8-0BA6-25A0-F51C-1C7DECBF6505}"/>
+              </a:ext>
+              <a:ext uri="{C183D7F6-B498-43B3-948B-1728B52AA6E4}">
+                <adec:decorative xmlns:adec="http://schemas.microsoft.com/office/drawing/2017/decorative" val="1"/>
+              </a:ext>
+            </a:extLst>
+          </p:cNvPr>
+          <p:cNvCxnSpPr>
+            <a:cxnSpLocks noGrp="1" noRot="1" noChangeAspect="1" noMove="1" noResize="1" noEditPoints="1" noAdjustHandles="1" noChangeArrowheads="1" noChangeShapeType="1"/>
+          </p:cNvCxnSpPr>
+          <p:nvPr>
+            <p:extLst>
+              <p:ext uri="{386F3935-93C4-4BCD-93E2-E3B085C9AB24}">
+                <p16:designElem xmlns:p16="http://schemas.microsoft.com/office/powerpoint/2015/main" val="1"/>
+              </p:ext>
+            </p:extLst>
+          </p:nvPr>
+        </p:nvCxnSpPr>
+        <p:spPr>
+          <a:xfrm flipH="1">
+            <a:off x="0" y="6252485"/>
+            <a:ext cx="9144000" cy="0"/>
+          </a:xfrm>
+          <a:prstGeom prst="line">
+            <a:avLst/>
+          </a:prstGeom>
+          <a:ln w="12700">
+            <a:solidFill>
+              <a:schemeClr val="accent2"/>
+            </a:solidFill>
+          </a:ln>
+        </p:spPr>
+        <p:style>
+          <a:lnRef idx="1">
+            <a:schemeClr val="accent1"/>
+          </a:lnRef>
+          <a:fillRef idx="0">
+            <a:schemeClr val="accent1"/>
+          </a:fillRef>
+          <a:effectRef idx="0">
+            <a:schemeClr val="accent1"/>
+          </a:effectRef>
+          <a:fontRef idx="minor">
+            <a:schemeClr val="tx1"/>
+          </a:fontRef>
+        </p:style>
+      </p:cxnSp>
+      <p:sp>
+        <p:nvSpPr>
+          <p:cNvPr id="4" name="Espaço Reservado para Data 3">
+            <a:extLst>
+              <a:ext uri="{FF2B5EF4-FFF2-40B4-BE49-F238E27FC236}">
+                <a16:creationId xmlns:a16="http://schemas.microsoft.com/office/drawing/2014/main" id="{D84D780E-51F8-3593-18E9-320BD9C37737}"/>
+              </a:ext>
+            </a:extLst>
+          </p:cNvPr>
+          <p:cNvSpPr>
+            <a:spLocks noGrp="1"/>
+          </p:cNvSpPr>
+          <p:nvPr>
+            <p:ph type="dt" sz="half" idx="10"/>
+          </p:nvPr>
+        </p:nvSpPr>
+        <p:spPr>
+          <a:xfrm>
+            <a:off x="1249149" y="6356350"/>
+            <a:ext cx="2057400" cy="365125"/>
+          </a:xfrm>
+        </p:spPr>
+        <p:txBody>
+          <a:bodyPr>
+            <a:normAutofit/>
+          </a:bodyPr>
+          <a:lstStyle/>
+          <a:p>
+            <a:pPr>
+              <a:spcAft>
+                <a:spcPts val="600"/>
+              </a:spcAft>
+            </a:pPr>
+            <a:fld id="{2E6BCE47-ED84-4E6B-A921-56FE573373A9}" type="datetime1">
+              <a:rPr lang="en-US">
+                <a:solidFill>
+                  <a:schemeClr val="bg1">
+                    <a:lumMod val="50000"/>
+                  </a:schemeClr>
+                </a:solidFill>
+              </a:rPr>
+              <a:pPr>
+                <a:spcAft>
+                  <a:spcPts val="600"/>
+                </a:spcAft>
+              </a:pPr>
+              <a:t>7/12/2026</a:t>
+            </a:fld>
+            <a:endParaRPr lang="en-US">
+              <a:solidFill>
+                <a:schemeClr val="bg1">
+                  <a:lumMod val="50000"/>
+                </a:schemeClr>
+              </a:solidFill>
+            </a:endParaRPr>
+          </a:p>
+        </p:txBody>
+      </p:sp>
+      <p:sp>
+        <p:nvSpPr>
+          <p:cNvPr id="5" name="Espaço Reservado para Rodapé 4">
+            <a:extLst>
+              <a:ext uri="{FF2B5EF4-FFF2-40B4-BE49-F238E27FC236}">
+                <a16:creationId xmlns:a16="http://schemas.microsoft.com/office/drawing/2014/main" id="{84115BF3-E287-EBE7-E32D-B204A383E9E9}"/>
+              </a:ext>
+            </a:extLst>
+          </p:cNvPr>
+          <p:cNvSpPr>
+            <a:spLocks noGrp="1"/>
+          </p:cNvSpPr>
+          <p:nvPr>
+            <p:ph type="ftr" sz="quarter" idx="11"/>
+          </p:nvPr>
+        </p:nvSpPr>
+        <p:spPr>
+          <a:xfrm>
+            <a:off x="3547841" y="6356350"/>
+            <a:ext cx="3086100" cy="365125"/>
+          </a:xfrm>
+        </p:spPr>
+        <p:txBody>
+          <a:bodyPr>
+            <a:normAutofit/>
+          </a:bodyPr>
+          <a:lstStyle/>
+          <a:p>
+            <a:pPr>
+              <a:lnSpc>
+                <a:spcPct val="90000"/>
+              </a:lnSpc>
+              <a:spcAft>
+                <a:spcPts val="600"/>
+              </a:spcAft>
+            </a:pPr>
+            <a:r>
+              <a:rPr lang="en-US" sz="700">
+                <a:solidFill>
+                  <a:schemeClr val="bg1">
+                    <a:lumMod val="50000"/>
+                  </a:schemeClr>
+                </a:solidFill>
+              </a:rPr>
+              <a:t>
+              </a:t>
+            </a:r>
+          </a:p>
+        </p:txBody>
+      </p:sp>
+      <p:sp>
+        <p:nvSpPr>
+          <p:cNvPr id="6" name="Espaço Reservado para Número de Slide 5">
+            <a:extLst>
+              <a:ext uri="{FF2B5EF4-FFF2-40B4-BE49-F238E27FC236}">
+                <a16:creationId xmlns:a16="http://schemas.microsoft.com/office/drawing/2014/main" id="{52F4CBF9-9B2A-F8BE-8B74-65D9331CA97D}"/>
+              </a:ext>
+            </a:extLst>
+          </p:cNvPr>
+          <p:cNvSpPr>
+            <a:spLocks noGrp="1"/>
+          </p:cNvSpPr>
+          <p:nvPr>
+            <p:ph type="sldNum" sz="quarter" idx="12"/>
+          </p:nvPr>
+        </p:nvSpPr>
+        <p:spPr>
+          <a:xfrm>
+            <a:off x="6918595" y="6356350"/>
+            <a:ext cx="1334620" cy="365125"/>
+          </a:xfrm>
+        </p:spPr>
+        <p:txBody>
+          <a:bodyPr>
+            <a:normAutofit/>
+          </a:bodyPr>
+          <a:lstStyle/>
+          <a:p>
+            <a:pPr>
+              <a:spcAft>
+                <a:spcPts val="600"/>
+              </a:spcAft>
+            </a:pPr>
+            <a:fld id="{E30AF5A0-43BB-4336-8627-9123B9144D80}" type="slidenum">
+              <a:rPr lang="en-US">
+                <a:solidFill>
+                  <a:schemeClr val="bg1">
+                    <a:lumMod val="50000"/>
+                  </a:schemeClr>
+                </a:solidFill>
+              </a:rPr>
+              <a:pPr>
+                <a:spcAft>
+                  <a:spcPts val="600"/>
+                </a:spcAft>
+              </a:pPr>
+              <a:t>2</a:t>
+            </a:fld>
+            <a:endParaRPr lang="en-US">
+              <a:solidFill>
+                <a:schemeClr val="bg1">
+                  <a:lumMod val="50000"/>
+                </a:schemeClr>
+              </a:solidFill>
+            </a:endParaRPr>
+          </a:p>
+        </p:txBody>
+      </p:sp>
+      <p:sp>
+        <p:nvSpPr>
+          <p:cNvPr id="8" name="Subtítulo 2">
+            <a:extLst>
+              <a:ext uri="{FF2B5EF4-FFF2-40B4-BE49-F238E27FC236}">
+                <a16:creationId xmlns:a16="http://schemas.microsoft.com/office/drawing/2014/main" id="{7BC68FA1-7384-FD66-0BE9-9EAFC34EFC94}"/>
+              </a:ext>
+            </a:extLst>
+          </p:cNvPr>
+          <p:cNvSpPr txBox="1">
+            <a:spLocks/>
+          </p:cNvSpPr>
+          <p:nvPr/>
+        </p:nvSpPr>
+        <p:spPr>
+          <a:xfrm>
+            <a:off x="461296" y="6358294"/>
+            <a:ext cx="6053773" cy="914469"/>
+          </a:xfrm>
+          <a:prstGeom prst="rect">
+            <a:avLst/>
+          </a:prstGeom>
+        </p:spPr>
+        <p:txBody>
+          <a:bodyPr vert="horz" lIns="91440" tIns="45720" rIns="91440" bIns="45720" rtlCol="0" anchor="t">
+            <a:normAutofit/>
+          </a:bodyPr>
+          <a:lstStyle>
+            <a:lvl1pPr marL="0" indent="0" algn="ctr" defTabSz="914400" rtl="0" eaLnBrk="1" latinLnBrk="0" hangingPunct="1">
+              <a:lnSpc>
+                <a:spcPct val="90000"/>
+              </a:lnSpc>
+              <a:spcBef>
+                <a:spcPts val="1000"/>
+              </a:spcBef>
+              <a:buFont typeface="Arial" panose="020B0604020202020204" pitchFamily="34" charset="0"/>
+              <a:buNone/>
+              <a:defRPr sz="2400" kern="1200">
+                <a:solidFill>
+                  <a:schemeClr val="tx1"/>
+                </a:solidFill>
+                <a:latin typeface="+mn-lt"/>
+                <a:ea typeface="+mn-ea"/>
+                <a:cs typeface="+mn-cs"/>
+              </a:defRPr>
+            </a:lvl1pPr>
+            <a:lvl2pPr marL="457200" indent="0" algn="ctr" defTabSz="914400" rtl="0" eaLnBrk="1" latinLnBrk="0" hangingPunct="1">
+              <a:lnSpc>
+                <a:spcPct val="90000"/>
+              </a:lnSpc>
+              <a:spcBef>
+                <a:spcPts val="500"/>
+              </a:spcBef>
+              <a:buFont typeface="Arial" panose="020B0604020202020204" pitchFamily="34" charset="0"/>
+              <a:buNone/>
+              <a:defRPr sz="2000" kern="1200">
+                <a:solidFill>
+                  <a:schemeClr val="tx1"/>
+                </a:solidFill>
+                <a:latin typeface="+mn-lt"/>
+                <a:ea typeface="+mn-ea"/>
+                <a:cs typeface="+mn-cs"/>
+              </a:defRPr>
+            </a:lvl2pPr>
+            <a:lvl3pPr marL="914400" indent="0" algn="ctr" defTabSz="914400" rtl="0" eaLnBrk="1" latinLnBrk="0" hangingPunct="1">
+              <a:lnSpc>
+                <a:spcPct val="90000"/>
+              </a:lnSpc>
+              <a:spcBef>
+                <a:spcPts val="500"/>
+              </a:spcBef>
+              <a:buFont typeface="Arial" panose="020B0604020202020204" pitchFamily="34" charset="0"/>
+              <a:buNone/>
+              <a:defRPr sz="1800" kern="1200">
+                <a:solidFill>
+                  <a:schemeClr val="tx1"/>
+                </a:solidFill>
+                <a:latin typeface="+mn-lt"/>
+                <a:ea typeface="+mn-ea"/>
+                <a:cs typeface="+mn-cs"/>
+              </a:defRPr>
+            </a:lvl3pPr>
+            <a:lvl4pPr marL="1371600" indent="0" algn="ctr" defTabSz="914400" rtl="0" eaLnBrk="1" latinLnBrk="0" hangingPunct="1">
+              <a:lnSpc>
+                <a:spcPct val="90000"/>
+              </a:lnSpc>
+              <a:spcBef>
+                <a:spcPts val="500"/>
+              </a:spcBef>
+              <a:buFont typeface="Arial" panose="020B0604020202020204" pitchFamily="34" charset="0"/>
+              <a:buNone/>
+              <a:defRPr sz="1600" kern="1200">
+                <a:solidFill>
+                  <a:schemeClr val="tx1"/>
+                </a:solidFill>
+                <a:latin typeface="+mn-lt"/>
+                <a:ea typeface="+mn-ea"/>
+                <a:cs typeface="+mn-cs"/>
+              </a:defRPr>
+            </a:lvl4pPr>
+            <a:lvl5pPr marL="1828800" indent="0" algn="ctr" defTabSz="914400" rtl="0" eaLnBrk="1" latinLnBrk="0" hangingPunct="1">
+              <a:lnSpc>
+                <a:spcPct val="90000"/>
+              </a:lnSpc>
+              <a:spcBef>
+                <a:spcPts val="500"/>
+              </a:spcBef>
+              <a:buFont typeface="Arial" panose="020B0604020202020204" pitchFamily="34" charset="0"/>
+              <a:buNone/>
+              <a:defRPr sz="1600" kern="1200">
+                <a:solidFill>
+                  <a:schemeClr val="tx1"/>
+                </a:solidFill>
+                <a:latin typeface="+mn-lt"/>
+                <a:ea typeface="+mn-ea"/>
+                <a:cs typeface="+mn-cs"/>
+              </a:defRPr>
+            </a:lvl5pPr>
+            <a:lvl6pPr marL="2286000" indent="0" algn="ctr" defTabSz="914400" rtl="0" eaLnBrk="1" latinLnBrk="0" hangingPunct="1">
+              <a:lnSpc>
+                <a:spcPct val="90000"/>
+              </a:lnSpc>
+              <a:spcBef>
+                <a:spcPts val="500"/>
+              </a:spcBef>
+              <a:buFont typeface="Arial" panose="020B0604020202020204" pitchFamily="34" charset="0"/>
+              <a:buNone/>
+              <a:defRPr sz="1600" kern="1200">
+                <a:solidFill>
+                  <a:schemeClr val="tx1"/>
+                </a:solidFill>
+                <a:latin typeface="+mn-lt"/>
+                <a:ea typeface="+mn-ea"/>
+                <a:cs typeface="+mn-cs"/>
+              </a:defRPr>
+            </a:lvl6pPr>
+            <a:lvl7pPr marL="2743200" indent="0" algn="ctr" defTabSz="914400" rtl="0" eaLnBrk="1" latinLnBrk="0" hangingPunct="1">
+              <a:lnSpc>
+                <a:spcPct val="90000"/>
+              </a:lnSpc>
+              <a:spcBef>
+                <a:spcPts val="500"/>
+              </a:spcBef>
+              <a:buFont typeface="Arial" panose="020B0604020202020204" pitchFamily="34" charset="0"/>
+              <a:buNone/>
+              <a:defRPr sz="1600" kern="1200">
+                <a:solidFill>
+                  <a:schemeClr val="tx1"/>
+                </a:solidFill>
+                <a:latin typeface="+mn-lt"/>
+                <a:ea typeface="+mn-ea"/>
+                <a:cs typeface="+mn-cs"/>
+              </a:defRPr>
+            </a:lvl7pPr>
+            <a:lvl8pPr marL="3200400" indent="0" algn="ctr" defTabSz="914400" rtl="0" eaLnBrk="1" latinLnBrk="0" hangingPunct="1">
+              <a:lnSpc>
+                <a:spcPct val="90000"/>
+              </a:lnSpc>
+              <a:spcBef>
+                <a:spcPts val="500"/>
+              </a:spcBef>
+              <a:buFont typeface="Arial" panose="020B0604020202020204" pitchFamily="34" charset="0"/>
+              <a:buNone/>
+              <a:defRPr sz="1600" kern="1200">
+                <a:solidFill>
+                  <a:schemeClr val="tx1"/>
+                </a:solidFill>
+                <a:latin typeface="+mn-lt"/>
+                <a:ea typeface="+mn-ea"/>
+                <a:cs typeface="+mn-cs"/>
+              </a:defRPr>
+            </a:lvl8pPr>
+            <a:lvl9pPr marL="3657600" indent="0" algn="ctr" defTabSz="914400" rtl="0" eaLnBrk="1" latinLnBrk="0" hangingPunct="1">
+              <a:lnSpc>
+                <a:spcPct val="90000"/>
+              </a:lnSpc>
+              <a:spcBef>
+                <a:spcPts val="500"/>
+              </a:spcBef>
+              <a:buFont typeface="Arial" panose="020B0604020202020204" pitchFamily="34" charset="0"/>
+              <a:buNone/>
+              <a:defRPr sz="1600" kern="1200">
+                <a:solidFill>
+                  <a:schemeClr val="tx1"/>
+                </a:solidFill>
+                <a:latin typeface="+mn-lt"/>
+                <a:ea typeface="+mn-ea"/>
+                <a:cs typeface="+mn-cs"/>
+              </a:defRPr>
+            </a:lvl9pPr>
+          </a:lstStyle>
+          <a:p>
+            <a:pPr algn="l"/>
+            <a:r>
+              <a:rPr lang="pt-BR" sz="1400" dirty="0">
+                <a:solidFill>
+                  <a:schemeClr val="bg1"/>
+                </a:solidFill>
+              </a:rPr>
+              <a:t>Eduardo Toshio Yonamine – 9IADT – </a:t>
+            </a:r>
+            <a:r>
+              <a:rPr lang="pt-BR" sz="1400">
+                <a:solidFill>
+                  <a:schemeClr val="bg1"/>
+                </a:solidFill>
+              </a:rPr>
+              <a:t>GRUPO 37</a:t>
+            </a:r>
+          </a:p>
+        </p:txBody>
+      </p:sp>
+      <p:sp>
+        <p:nvSpPr>
+          <p:cNvPr id="16" name="Subtítulo 2">
+            <a:extLst>
+              <a:ext uri="{FF2B5EF4-FFF2-40B4-BE49-F238E27FC236}">
+                <a16:creationId xmlns:a16="http://schemas.microsoft.com/office/drawing/2014/main" id="{C465D23D-198F-56C0-F181-CB05B4C9B502}"/>
+              </a:ext>
+            </a:extLst>
+          </p:cNvPr>
+          <p:cNvSpPr>
+            <a:spLocks noGrp="1"/>
+          </p:cNvSpPr>
+          <p:nvPr>
+            <p:ph type="subTitle" idx="1"/>
+          </p:nvPr>
+        </p:nvSpPr>
+        <p:spPr>
+          <a:xfrm>
+            <a:off x="462124" y="147961"/>
+            <a:ext cx="6574981" cy="443553"/>
+          </a:xfrm>
+        </p:spPr>
+        <p:txBody>
+          <a:bodyPr vert="horz" lIns="91440" tIns="45720" rIns="91440" bIns="45720" rtlCol="0" anchor="t">
+            <a:normAutofit/>
+          </a:bodyPr>
+          <a:lstStyle/>
+          <a:p>
+            <a:pPr algn="l"/>
+            <a:r>
+              <a:rPr lang="pt-BR" sz="2000">
+                <a:solidFill>
+                  <a:schemeClr val="bg1"/>
+                </a:solidFill>
+              </a:rPr>
+              <a:t>FASE 2 – PROJETO 2 - OTIMIZAÇÃO DE ROTAS MÉDICAS</a:t>
+            </a:r>
+          </a:p>
+        </p:txBody>
+      </p:sp>
+      <p:sp>
+        <p:nvSpPr>
+          <p:cNvPr id="23" name="CaixaDeTexto 22">
+            <a:extLst>
+              <a:ext uri="{FF2B5EF4-FFF2-40B4-BE49-F238E27FC236}">
+                <a16:creationId xmlns:a16="http://schemas.microsoft.com/office/drawing/2014/main" id="{A9D543A4-6259-AF3E-7E17-C7411B3B08F7}"/>
+              </a:ext>
+            </a:extLst>
+          </p:cNvPr>
+          <p:cNvSpPr txBox="1"/>
+          <p:nvPr/>
+        </p:nvSpPr>
+        <p:spPr>
+          <a:xfrm>
+            <a:off x="712895" y="808503"/>
+            <a:ext cx="7901788" cy="1600438"/>
+          </a:xfrm>
+          <a:prstGeom prst="rect">
+            <a:avLst/>
+          </a:prstGeom>
+          <a:noFill/>
+        </p:spPr>
+        <p:txBody>
+          <a:bodyPr rot="0" spcFirstLastPara="0" vertOverflow="overflow" horzOverflow="overflow" vert="horz" wrap="square" lIns="91440" tIns="45720" rIns="91440" bIns="45720" numCol="1" spcCol="0" rtlCol="0" fromWordArt="0" anchor="t" anchorCtr="0" forceAA="0" compatLnSpc="1">
+            <a:prstTxWarp prst="textNoShape">
+              <a:avLst/>
+            </a:prstTxWarp>
+            <a:spAutoFit/>
+          </a:bodyPr>
+          <a:lstStyle/>
+          <a:p>
+            <a:r>
+              <a:rPr lang="pt-BR" sz="1400">
+                <a:solidFill>
+                  <a:srgbClr val="FFFFFF"/>
+                </a:solidFill>
+              </a:rPr>
+              <a:t>Objetivo: </a:t>
+            </a:r>
+            <a:endParaRPr lang="pt-BR"/>
+          </a:p>
+          <a:p>
+            <a:endParaRPr lang="pt-BR" sz="1400" dirty="0">
+              <a:solidFill>
+                <a:srgbClr val="FFFFFF"/>
+              </a:solidFill>
+            </a:endParaRPr>
+          </a:p>
+          <a:p>
+            <a:r>
+              <a:rPr lang="pt-BR" sz="1400">
+                <a:solidFill>
+                  <a:srgbClr val="FFFFFF"/>
+                </a:solidFill>
+              </a:rPr>
+              <a:t>Desenvolver um sistema que resolva o </a:t>
+            </a:r>
+            <a:r>
+              <a:rPr lang="pt-BR" sz="1400" dirty="0">
+                <a:solidFill>
+                  <a:srgbClr val="FFFFFF"/>
+                </a:solidFill>
+              </a:rPr>
+              <a:t>problema do caixeiro viajante (TSP) para otimizar rotas de </a:t>
+            </a:r>
+            <a:r>
+              <a:rPr lang="pt-BR" sz="1400">
+                <a:solidFill>
+                  <a:srgbClr val="FFFFFF"/>
+                </a:solidFill>
+              </a:rPr>
+              <a:t>entrega de medicamentos e insumos.</a:t>
+            </a:r>
+            <a:endParaRPr lang="pt-BR"/>
+          </a:p>
+          <a:p>
+            <a:pPr algn="l"/>
+            <a:endParaRPr lang="pt-BR" sz="1400" dirty="0">
+              <a:solidFill>
+                <a:srgbClr val="FFFFFF"/>
+              </a:solidFill>
+            </a:endParaRPr>
+          </a:p>
+          <a:p>
+            <a:r>
+              <a:rPr lang="pt-BR" sz="1400">
+                <a:solidFill>
+                  <a:schemeClr val="bg1"/>
+                </a:solidFill>
+              </a:rPr>
+              <a:t>O sistema hospitalar enfrenta desafios logísticos na distribuição eficiente de medicamentos e insumos entre suas diversas unidades e para atendimento domiciliar e unidades básicas de saúde.</a:t>
+            </a:r>
+            <a:endParaRPr lang="pt-BR">
+              <a:solidFill>
+                <a:schemeClr val="bg1"/>
+              </a:solidFill>
+            </a:endParaRPr>
+          </a:p>
+        </p:txBody>
+      </p:sp>
+      <p:pic>
+        <p:nvPicPr>
+          <p:cNvPr id="25" name="Imagem 24">
+            <a:extLst>
+              <a:ext uri="{FF2B5EF4-FFF2-40B4-BE49-F238E27FC236}">
+                <a16:creationId xmlns:a16="http://schemas.microsoft.com/office/drawing/2014/main" id="{ED0B5CED-CD18-DAF1-0257-3F199B19A993}"/>
+              </a:ext>
+            </a:extLst>
+          </p:cNvPr>
+          <p:cNvPicPr>
+            <a:picLocks noChangeAspect="1"/>
+          </p:cNvPicPr>
+          <p:nvPr/>
+        </p:nvPicPr>
+        <p:blipFill>
+          <a:blip r:embed="rId2"/>
+          <a:stretch>
+            <a:fillRect/>
+          </a:stretch>
+        </p:blipFill>
+        <p:spPr>
+          <a:xfrm>
+            <a:off x="841248" y="2507950"/>
+            <a:ext cx="7479792" cy="3547456"/>
+          </a:xfrm>
+          <a:prstGeom prst="rect">
+            <a:avLst/>
+          </a:prstGeom>
+        </p:spPr>
+      </p:pic>
+    </p:spTree>
+    <p:extLst>
+      <p:ext uri="{BB962C8B-B14F-4D97-AF65-F5344CB8AC3E}">
+        <p14:creationId xmlns:p14="http://schemas.microsoft.com/office/powerpoint/2010/main" val="2860892542"/>
+      </p:ext>
+    </p:extLst>
+  </p:cSld>
+  <p:clrMapOvr>
+    <a:masterClrMapping/>
+  </p:clrMapOvr>
+</p:sld>
+</file>
+
+<file path=ppt/slides/slide3.xml><?xml version="1.0" encoding="utf-8"?>
+<p:sld xmlns:a="http://schemas.openxmlformats.org/drawingml/2006/main" xmlns:r="http://schemas.openxmlformats.org/officeDocument/2006/relationships" xmlns:p="http://schemas.openxmlformats.org/presentationml/2006/main">
+  <p:cSld>
     <p:spTree>
       <p:nvGrpSpPr>
         <p:cNvPr id="1" name=""/>
@@ -3020,7 +4450,71 @@
           <a:chExt cx="0" cy="0"/>
         </a:xfrm>
       </p:grpSpPr>
+      <p:sp>
+        <p:nvSpPr>
+          <p:cNvPr id="2" name="Título 1">
+            <a:extLst>
+              <a:ext uri="{FF2B5EF4-FFF2-40B4-BE49-F238E27FC236}">
+                <a16:creationId xmlns:a16="http://schemas.microsoft.com/office/drawing/2014/main" id="{0E2B5801-F7FD-9178-0463-7E2191B510F1}"/>
+              </a:ext>
+            </a:extLst>
+          </p:cNvPr>
+          <p:cNvSpPr>
+            <a:spLocks noGrp="1"/>
+          </p:cNvSpPr>
+          <p:nvPr>
+            <p:ph type="title"/>
+          </p:nvPr>
+        </p:nvSpPr>
+        <p:spPr/>
+        <p:txBody>
+          <a:bodyPr/>
+          <a:lstStyle/>
+          <a:p>
+            <a:r>
+              <a:rPr lang="pt-BR"/>
+              <a:t>Objetivo</a:t>
+            </a:r>
+            <a:endParaRPr lang="pt-BR" dirty="0"/>
+          </a:p>
+        </p:txBody>
+      </p:sp>
+      <p:sp>
+        <p:nvSpPr>
+          <p:cNvPr id="3" name="Espaço Reservado para Conteúdo 2">
+            <a:extLst>
+              <a:ext uri="{FF2B5EF4-FFF2-40B4-BE49-F238E27FC236}">
+                <a16:creationId xmlns:a16="http://schemas.microsoft.com/office/drawing/2014/main" id="{E4450EA1-6A9F-1B9A-1E46-FBDC02DAE4DA}"/>
+              </a:ext>
+            </a:extLst>
+          </p:cNvPr>
+          <p:cNvSpPr>
+            <a:spLocks noGrp="1"/>
+          </p:cNvSpPr>
+          <p:nvPr>
+            <p:ph idx="1"/>
+          </p:nvPr>
+        </p:nvSpPr>
+        <p:spPr/>
+        <p:txBody>
+          <a:bodyPr vert="horz" lIns="91440" tIns="45720" rIns="91440" bIns="45720" rtlCol="0" anchor="t">
+            <a:normAutofit/>
+          </a:bodyPr>
+          <a:lstStyle/>
+          <a:p>
+            <a:r>
+              <a:rPr lang="pt-BR"/>
+              <a:t>APRESENTA</a:t>
+            </a:r>
+          </a:p>
+        </p:txBody>
+      </p:sp>
     </p:spTree>
+    <p:extLst>
+      <p:ext uri="{BB962C8B-B14F-4D97-AF65-F5344CB8AC3E}">
+        <p14:creationId xmlns:p14="http://schemas.microsoft.com/office/powerpoint/2010/main" val="3847839957"/>
+      </p:ext>
+    </p:extLst>
   </p:cSld>
   <p:clrMapOvr>
     <a:masterClrMapping/>
@@ -3045,13 +4539,13 @@
         <a:srgbClr val="E8E8E8"/>
       </a:lt2>
       <a:accent1>
-        <a:srgbClr val="196B24"/>
+        <a:srgbClr val="156082"/>
       </a:accent1>
       <a:accent2>
-        <a:srgbClr val="4EA72E"/>
+        <a:srgbClr val="E97132"/>
       </a:accent2>
       <a:accent3>
-        <a:srgbClr val="156082"/>
+        <a:srgbClr val="196B24"/>
       </a:accent3>
       <a:accent4>
         <a:srgbClr val="0F9ED5"/>
@@ -3060,13 +4554,13 @@
         <a:srgbClr val="A02B93"/>
       </a:accent5>
       <a:accent6>
-        <a:srgbClr val="E97132"/>
+        <a:srgbClr val="4EA72E"/>
       </a:accent6>
       <a:hlink>
-        <a:srgbClr val="538D9D"/>
+        <a:srgbClr val="467886"/>
       </a:hlink>
       <a:folHlink>
-        <a:srgbClr val="A5738E"/>
+        <a:srgbClr val="96607D"/>
       </a:folHlink>
     </a:clrScheme>
     <a:fontScheme name="Office Theme">
@@ -3337,7 +4831,7 @@
   <a:extraClrSchemeLst/>
   <a:extLst>
     <a:ext uri="{05A4C25C-085E-4340-85A3-A5531E510DB2}">
-      <thm15:themeFamily xmlns:thm15="http://schemas.microsoft.com/office/thememl/2012/main" name="Office Theme" id="{2E142A2C-CD16-42D6-873A-C26D2A0506FA}" vid="{C0A3E416-13B0-4CFE-8B85-8989D8AEFB51}"/>
+      <thm15:themeFamily xmlns:thm15="http://schemas.microsoft.com/office/thememl/2012/main" name="Office Theme" id="{2E142A2C-CD16-42D6-873A-C26D2A0506FA}" vid="{1BDDFF52-6CD6-40A5-AB3C-68EB2F1E4D0A}"/>
     </a:ext>
   </a:extLst>
 </a:theme>
